--- a/dist/초6/수학/연산과비례/초6_수학_연산과비례_07_비례식_학생용.pptx
+++ b/dist/초6/수학/연산과비례/초6_수학_연산과비례_07_비례식_학생용.pptx
@@ -120,13 +120,13 @@
   <p:extLst>
     <p:ext uri="{521415D9-36F7-43E2-AB2F-B90AF26B5E84}">
       <p14:sectionLst xmlns:p14="http://schemas.microsoft.com/office/powerpoint/2010/main">
-        <p14:section name="도입" id="{bfe7298c-4eac-3a48-6792-90a27a930fdf}">
+        <p14:section name="도입" id="{771da401-3842-0f3e-aeb4-dec19b1879f6}">
           <p14:sldIdLst>
             <p14:sldId id="256"/>
             <p14:sldId id="257"/>
           </p14:sldIdLst>
         </p14:section>
-        <p14:section name="개념" id="{86b25077-6d96-2d69-aece-7d2adb68d4d1}">
+        <p14:section name="개념" id="{7683c0ec-ba9a-c2f3-3fda-fab31b649d36}">
           <p14:sldIdLst>
             <p14:sldId id="258"/>
             <p14:sldId id="259"/>
@@ -134,7 +134,7 @@
             <p14:sldId id="262"/>
           </p14:sldIdLst>
         </p14:section>
-        <p14:section name="연습" id="{73370d77-cf64-ec5c-8e1c-824d5e0946e2}">
+        <p14:section name="연습" id="{ee48bece-8496-85b5-c144-9fb751ebb9fe}">
           <p14:sldIdLst>
             <p14:sldId id="260"/>
             <p14:sldId id="263"/>
@@ -142,24 +142,24 @@
             <p14:sldId id="265"/>
           </p14:sldIdLst>
         </p14:section>
-        <p14:section name="개념" id="{cee1438b-5984-cc1f-118e-91f7ea0918b9}">
+        <p14:section name="개념" id="{732fb1c3-a09c-deb1-53a9-f890a2142cd3}">
           <p14:sldIdLst/>
         </p14:section>
-        <p14:section name="연습" id="{51face98-efc8-9317-e29c-ce4bdf7c3880}">
+        <p14:section name="연습" id="{a136b8fb-eea4-46b3-898a-1eb7aecabb49}">
           <p14:sldIdLst/>
         </p14:section>
-        <p14:section name="확인" id="{e1bad656-423d-df01-8947-53d7981b9b53}">
+        <p14:section name="확인" id="{4874aa43-5e16-fb7c-14af-76840f727e44}">
           <p14:sldIdLst>
             <p14:sldId id="266"/>
             <p14:sldId id="267"/>
           </p14:sldIdLst>
         </p14:section>
-        <p14:section name="정리" id="{493cbc54-b33f-7eca-0edd-29d205d02496}">
+        <p14:section name="정리" id="{7c050eac-3af1-6bcc-15b0-f3e7c8392c29}">
           <p14:sldIdLst>
             <p14:sldId id="268"/>
           </p14:sldIdLst>
         </p14:section>
-        <p14:section name="보충" id="{519fb496-91a9-d780-2713-f47f3f124f50}">
+        <p14:section name="보충" id="{6797e416-7fcb-b6f1-dc7b-47e07571ff6f}">
           <p14:sldIdLst>
             <p14:sldId id="269"/>
           </p14:sldIdLst>
@@ -3247,7 +3247,7 @@
                 <a:ea typeface="맑은 고딕" pitchFamily="34" charset="-122"/>
                 <a:cs typeface="맑은 고딕" pitchFamily="34" charset="-120"/>
               </a:rPr>
-              <a:t>원액이 60 mL이면 물은 몇 mL인가요?</a:t>
+              <a:t>원액이 60 mL이면 물은 몇 mL인가요?</a:t>
             </a:r>
             <a:endParaRPr lang="ko-KR" sz="2800" dirty="0"/>
           </a:p>
@@ -3333,7 +3333,7 @@
                 <a:ea typeface="맑은 고딕" pitchFamily="34" charset="-122"/>
                 <a:cs typeface="맑은 고딕" pitchFamily="34" charset="-120"/>
               </a:rPr>
-              <a:t>쿠키 4개에 버터가 30 g 들어요.</a:t>
+              <a:t>쿠키 4개에 버터가 30 g 들어요.</a:t>
             </a:r>
             <a:endParaRPr lang="ko-KR" sz="2800" dirty="0"/>
           </a:p>
@@ -4059,7 +4059,7 @@
                 <a:ea typeface="맑은 고딕" pitchFamily="34" charset="-122"/>
                 <a:cs typeface="맑은 고딕" pitchFamily="34" charset="-120"/>
               </a:rPr>
-              <a:t>가로가 45 cm이면 세로는 몇 cm인가요?</a:t>
+              <a:t>가로가 45 cm이면 세로는 몇 cm인가요?</a:t>
             </a:r>
             <a:endParaRPr lang="ko-KR" sz="2800" dirty="0"/>
           </a:p>
@@ -4145,7 +4145,7 @@
                 <a:ea typeface="맑은 고딕" pitchFamily="34" charset="-122"/>
                 <a:cs typeface="맑은 고딕" pitchFamily="34" charset="-120"/>
               </a:rPr>
-              <a:t>3분 동안 0.6 km를 걷는 빠르기로</a:t>
+              <a:t>3분 동안 0.6 km를 걷는 빠르기로</a:t>
             </a:r>
             <a:endParaRPr lang="ko-KR" sz="2800" dirty="0"/>
           </a:p>
